--- a/fixtures/briefs/drift/drift-slide-count.pptx
+++ b/fixtures/briefs/drift/drift-slide-count.pptx
@@ -919,7 +919,7 @@
           <a:noFill/>
         </p:spPr>
         <p:txBody>
-          <a:bodyPr vert="horz" wrap="square" lIns="0" tIns="0" rIns="0" bIns="0" rtlCol="0" anchor="t">
+          <a:bodyPr vert="horz" wrap="square" lIns="0" tIns="0" rIns="0" bIns="18582" rtlCol="0" anchor="b">
             <a:noAutofit/>
           </a:bodyPr>
           <a:lstStyle>
@@ -1418,7 +1418,7 @@
           <a:noFill/>
         </p:spPr>
         <p:txBody>
-          <a:bodyPr vert="horz" wrap="square" lIns="0" tIns="0" rIns="0" bIns="0" rtlCol="0" anchor="t">
+          <a:bodyPr vert="horz" wrap="square" lIns="0" tIns="0" rIns="0" bIns="13514" rtlCol="0" anchor="b">
             <a:noAutofit/>
           </a:bodyPr>
           <a:lstStyle>
@@ -1599,7 +1599,7 @@
           <a:noFill/>
         </p:spPr>
         <p:txBody>
-          <a:bodyPr vert="horz" wrap="square" lIns="0" tIns="0" rIns="0" bIns="0" rtlCol="0" anchor="t">
+          <a:bodyPr vert="horz" wrap="square" lIns="0" tIns="0" rIns="0" bIns="13514" rtlCol="0" anchor="b">
             <a:noAutofit/>
           </a:bodyPr>
           <a:lstStyle>
@@ -1961,7 +1961,7 @@
           <a:noFill/>
         </p:spPr>
         <p:txBody>
-          <a:bodyPr vert="horz" wrap="square" lIns="0" tIns="0" rIns="0" bIns="0" rtlCol="0" anchor="t">
+          <a:bodyPr vert="horz" wrap="square" lIns="0" tIns="0" rIns="0" bIns="18582" rtlCol="0" anchor="b">
             <a:noAutofit/>
           </a:bodyPr>
           <a:lstStyle>

--- a/fixtures/briefs/drift/drift-slide-count.pptx
+++ b/fixtures/briefs/drift/drift-slide-count.pptx
@@ -919,7 +919,7 @@
           <a:noFill/>
         </p:spPr>
         <p:txBody>
-          <a:bodyPr vert="horz" wrap="square" lIns="0" tIns="0" rIns="0" bIns="18582" rtlCol="0" anchor="b">
+          <a:bodyPr vert="horz" wrap="square" lIns="0" tIns="0" rIns="0" bIns="41910" rtlCol="0" anchor="b">
             <a:noAutofit/>
           </a:bodyPr>
           <a:lstStyle>
@@ -1418,7 +1418,7 @@
           <a:noFill/>
         </p:spPr>
         <p:txBody>
-          <a:bodyPr vert="horz" wrap="square" lIns="0" tIns="0" rIns="0" bIns="13514" rtlCol="0" anchor="b">
+          <a:bodyPr vert="horz" wrap="square" lIns="0" tIns="0" rIns="0" bIns="30480" rtlCol="0" anchor="b">
             <a:noAutofit/>
           </a:bodyPr>
           <a:lstStyle>
@@ -1599,7 +1599,7 @@
           <a:noFill/>
         </p:spPr>
         <p:txBody>
-          <a:bodyPr vert="horz" wrap="square" lIns="0" tIns="0" rIns="0" bIns="13514" rtlCol="0" anchor="b">
+          <a:bodyPr vert="horz" wrap="square" lIns="0" tIns="0" rIns="0" bIns="30480" rtlCol="0" anchor="b">
             <a:noAutofit/>
           </a:bodyPr>
           <a:lstStyle>
@@ -1961,7 +1961,7 @@
           <a:noFill/>
         </p:spPr>
         <p:txBody>
-          <a:bodyPr vert="horz" wrap="square" lIns="0" tIns="0" rIns="0" bIns="18582" rtlCol="0" anchor="b">
+          <a:bodyPr vert="horz" wrap="square" lIns="0" tIns="0" rIns="0" bIns="41910" rtlCol="0" anchor="b">
             <a:noAutofit/>
           </a:bodyPr>
           <a:lstStyle>

--- a/fixtures/briefs/drift/drift-slide-count.pptx
+++ b/fixtures/briefs/drift/drift-slide-count.pptx
@@ -31,6 +31,7 @@
           <a:srgbClr val="111111"/>
         </a:solidFill>
         <a:latin typeface="+mn-lt"/>
+        <a:cs typeface="+mn-cs"/>
       </a:defRPr>
     </a:lvl1pPr>
     <a:lvl2pPr marL="0" indent="0" algn="l">
@@ -49,6 +50,7 @@
           <a:srgbClr val="111111"/>
         </a:solidFill>
         <a:latin typeface="+mn-lt"/>
+        <a:cs typeface="+mn-cs"/>
       </a:defRPr>
     </a:lvl2pPr>
     <a:lvl3pPr marL="0" indent="0" algn="l">
@@ -67,6 +69,7 @@
           <a:srgbClr val="111111"/>
         </a:solidFill>
         <a:latin typeface="+mn-lt"/>
+        <a:cs typeface="+mn-cs"/>
       </a:defRPr>
     </a:lvl3pPr>
     <a:lvl4pPr marL="0" indent="0" algn="l">
@@ -85,6 +88,7 @@
           <a:srgbClr val="111111"/>
         </a:solidFill>
         <a:latin typeface="+mn-lt"/>
+        <a:cs typeface="+mn-cs"/>
       </a:defRPr>
     </a:lvl4pPr>
     <a:lvl5pPr marL="0" indent="0" algn="l">
@@ -103,6 +107,7 @@
           <a:srgbClr val="111111"/>
         </a:solidFill>
         <a:latin typeface="+mn-lt"/>
+        <a:cs typeface="+mn-cs"/>
       </a:defRPr>
     </a:lvl5pPr>
     <a:lvl6pPr marL="0" indent="0" algn="l">
@@ -121,6 +126,7 @@
           <a:srgbClr val="111111"/>
         </a:solidFill>
         <a:latin typeface="+mn-lt"/>
+        <a:cs typeface="+mn-cs"/>
       </a:defRPr>
     </a:lvl6pPr>
     <a:lvl7pPr marL="0" indent="0" algn="l">
@@ -139,6 +145,7 @@
           <a:srgbClr val="111111"/>
         </a:solidFill>
         <a:latin typeface="+mn-lt"/>
+        <a:cs typeface="+mn-cs"/>
       </a:defRPr>
     </a:lvl7pPr>
     <a:lvl8pPr marL="0" indent="0" algn="l">
@@ -157,6 +164,7 @@
           <a:srgbClr val="111111"/>
         </a:solidFill>
         <a:latin typeface="+mn-lt"/>
+        <a:cs typeface="+mn-cs"/>
       </a:defRPr>
     </a:lvl8pPr>
     <a:lvl9pPr marL="0" indent="0" algn="l">
@@ -175,6 +183,7 @@
           <a:srgbClr val="111111"/>
         </a:solidFill>
         <a:latin typeface="+mn-lt"/>
+        <a:cs typeface="+mn-cs"/>
       </a:defRPr>
     </a:lvl9pPr>
   </p:defaultTextStyle>
@@ -939,6 +948,7 @@
                   <a:srgbClr val="111111"/>
                 </a:solidFill>
                 <a:latin typeface="+mj-lt"/>
+                <a:cs typeface="+mj-cs"/>
               </a:defRPr>
             </a:lvl1pPr>
           </a:lstStyle>
@@ -991,6 +1001,7 @@
                   <a:srgbClr val="111111"/>
                 </a:solidFill>
                 <a:latin typeface="+mn-lt"/>
+                <a:cs typeface="+mn-cs"/>
               </a:defRPr>
             </a:lvl1pPr>
           </a:lstStyle>
@@ -1043,6 +1054,7 @@
                   <a:srgbClr val="5C5C5A"/>
                 </a:solidFill>
                 <a:latin typeface="+mn-lt"/>
+                <a:cs typeface="+mn-cs"/>
               </a:defRPr>
             </a:lvl1pPr>
           </a:lstStyle>
@@ -1128,6 +1140,7 @@
                   <a:srgbClr val="F2F2F0"/>
                 </a:solidFill>
                 <a:latin typeface="+mj-lt"/>
+                <a:cs typeface="+mj-cs"/>
               </a:defRPr>
             </a:lvl1pPr>
           </a:lstStyle>
@@ -1180,6 +1193,7 @@
                   <a:srgbClr val="E8422E"/>
                 </a:solidFill>
                 <a:latin typeface="+mn-lt"/>
+                <a:cs typeface="+mn-cs"/>
               </a:defRPr>
             </a:lvl1pPr>
           </a:lstStyle>
@@ -1257,6 +1271,7 @@
                   <a:srgbClr val="111111"/>
                 </a:solidFill>
                 <a:latin typeface="+mj-lt"/>
+                <a:cs typeface="+mj-cs"/>
               </a:defRPr>
             </a:lvl1pPr>
           </a:lstStyle>
@@ -1309,6 +1324,7 @@
                   <a:srgbClr val="111111"/>
                 </a:solidFill>
                 <a:latin typeface="+mn-lt"/>
+                <a:cs typeface="+mn-cs"/>
               </a:defRPr>
             </a:lvl1pPr>
           </a:lstStyle>
@@ -1361,6 +1377,7 @@
                   <a:srgbClr val="5C5C5A"/>
                 </a:solidFill>
                 <a:latin typeface="+mn-lt"/>
+                <a:cs typeface="+mn-cs"/>
               </a:defRPr>
             </a:lvl1pPr>
           </a:lstStyle>
@@ -1438,6 +1455,7 @@
                   <a:srgbClr val="111111"/>
                 </a:solidFill>
                 <a:latin typeface="+mj-lt"/>
+                <a:cs typeface="+mj-cs"/>
               </a:defRPr>
             </a:lvl1pPr>
           </a:lstStyle>
@@ -1490,6 +1508,7 @@
                   <a:srgbClr val="111111"/>
                 </a:solidFill>
                 <a:latin typeface="+mn-lt"/>
+                <a:cs typeface="+mn-cs"/>
               </a:defRPr>
             </a:lvl1pPr>
           </a:lstStyle>
@@ -1542,6 +1561,7 @@
                   <a:srgbClr val="5C5C5A"/>
                 </a:solidFill>
                 <a:latin typeface="+mn-lt"/>
+                <a:cs typeface="+mn-cs"/>
               </a:defRPr>
             </a:lvl1pPr>
           </a:lstStyle>
@@ -1619,6 +1639,7 @@
                   <a:srgbClr val="111111"/>
                 </a:solidFill>
                 <a:latin typeface="+mj-lt"/>
+                <a:cs typeface="+mj-cs"/>
               </a:defRPr>
             </a:lvl1pPr>
           </a:lstStyle>
@@ -1671,6 +1692,7 @@
                   <a:srgbClr val="111111"/>
                 </a:solidFill>
                 <a:latin typeface="+mn-lt"/>
+                <a:cs typeface="+mn-cs"/>
               </a:defRPr>
             </a:lvl1pPr>
           </a:lstStyle>
@@ -1723,6 +1745,7 @@
                   <a:srgbClr val="111111"/>
                 </a:solidFill>
                 <a:latin typeface="+mn-lt"/>
+                <a:cs typeface="+mn-cs"/>
               </a:defRPr>
             </a:lvl1pPr>
           </a:lstStyle>
@@ -1775,6 +1798,7 @@
                   <a:srgbClr val="5C5C5A"/>
                 </a:solidFill>
                 <a:latin typeface="+mn-lt"/>
+                <a:cs typeface="+mn-cs"/>
               </a:defRPr>
             </a:lvl1pPr>
           </a:lstStyle>
@@ -1852,6 +1876,7 @@
                   <a:srgbClr val="111111"/>
                 </a:solidFill>
                 <a:latin typeface="+mj-lt"/>
+                <a:cs typeface="+mj-cs"/>
               </a:defRPr>
             </a:lvl1pPr>
           </a:lstStyle>
@@ -1904,6 +1929,7 @@
                   <a:srgbClr val="5C5C5A"/>
                 </a:solidFill>
                 <a:latin typeface="+mn-lt"/>
+                <a:cs typeface="+mn-cs"/>
               </a:defRPr>
             </a:lvl1pPr>
           </a:lstStyle>
@@ -1981,6 +2007,7 @@
                   <a:srgbClr val="111111"/>
                 </a:solidFill>
                 <a:latin typeface="+mj-lt"/>
+                <a:cs typeface="+mj-cs"/>
               </a:defRPr>
             </a:lvl1pPr>
           </a:lstStyle>
@@ -2033,6 +2060,7 @@
                   <a:srgbClr val="111111"/>
                 </a:solidFill>
                 <a:latin typeface="+mn-lt"/>
+                <a:cs typeface="+mn-cs"/>
               </a:defRPr>
             </a:lvl1pPr>
           </a:lstStyle>
@@ -2085,6 +2113,7 @@
                   <a:srgbClr val="5C5C5A"/>
                 </a:solidFill>
                 <a:latin typeface="+mn-lt"/>
+                <a:cs typeface="+mn-cs"/>
               </a:defRPr>
             </a:lvl1pPr>
           </a:lstStyle>
@@ -2170,6 +2199,7 @@
                   <a:srgbClr val="111111"/>
                 </a:solidFill>
                 <a:latin typeface="+mj-lt"/>
+                <a:cs typeface="+mj-cs"/>
               </a:defRPr>
             </a:lvl1pPr>
           </a:lstStyle>
@@ -2222,6 +2252,7 @@
                   <a:srgbClr val="111111"/>
                 </a:solidFill>
                 <a:latin typeface="+mn-lt"/>
+                <a:cs typeface="+mn-cs"/>
               </a:defRPr>
             </a:lvl1pPr>
           </a:lstStyle>
@@ -2263,6 +2294,7 @@
             <a:srgbClr val="111111"/>
           </a:solidFill>
           <a:latin typeface="+mj-lt"/>
+          <a:cs typeface="+mj-cs"/>
         </a:defRPr>
       </a:lvl1pPr>
       <a:lvl2pPr marL="0" indent="0" algn="l">
@@ -2281,6 +2313,7 @@
             <a:srgbClr val="111111"/>
           </a:solidFill>
           <a:latin typeface="+mj-lt"/>
+          <a:cs typeface="+mj-cs"/>
         </a:defRPr>
       </a:lvl2pPr>
       <a:lvl3pPr marL="0" indent="0" algn="l">
@@ -2299,6 +2332,7 @@
             <a:srgbClr val="111111"/>
           </a:solidFill>
           <a:latin typeface="+mj-lt"/>
+          <a:cs typeface="+mj-cs"/>
         </a:defRPr>
       </a:lvl3pPr>
       <a:lvl4pPr marL="0" indent="0" algn="l">
@@ -2317,6 +2351,7 @@
             <a:srgbClr val="111111"/>
           </a:solidFill>
           <a:latin typeface="+mj-lt"/>
+          <a:cs typeface="+mj-cs"/>
         </a:defRPr>
       </a:lvl4pPr>
       <a:lvl5pPr marL="0" indent="0" algn="l">
@@ -2335,6 +2370,7 @@
             <a:srgbClr val="111111"/>
           </a:solidFill>
           <a:latin typeface="+mj-lt"/>
+          <a:cs typeface="+mj-cs"/>
         </a:defRPr>
       </a:lvl5pPr>
       <a:lvl6pPr marL="0" indent="0" algn="l">
@@ -2353,6 +2389,7 @@
             <a:srgbClr val="111111"/>
           </a:solidFill>
           <a:latin typeface="+mj-lt"/>
+          <a:cs typeface="+mj-cs"/>
         </a:defRPr>
       </a:lvl6pPr>
       <a:lvl7pPr marL="0" indent="0" algn="l">
@@ -2371,6 +2408,7 @@
             <a:srgbClr val="111111"/>
           </a:solidFill>
           <a:latin typeface="+mj-lt"/>
+          <a:cs typeface="+mj-cs"/>
         </a:defRPr>
       </a:lvl7pPr>
       <a:lvl8pPr marL="0" indent="0" algn="l">
@@ -2389,6 +2427,7 @@
             <a:srgbClr val="111111"/>
           </a:solidFill>
           <a:latin typeface="+mj-lt"/>
+          <a:cs typeface="+mj-cs"/>
         </a:defRPr>
       </a:lvl8pPr>
       <a:lvl9pPr marL="0" indent="0" algn="l">
@@ -2407,6 +2446,7 @@
             <a:srgbClr val="111111"/>
           </a:solidFill>
           <a:latin typeface="+mj-lt"/>
+          <a:cs typeface="+mj-cs"/>
         </a:defRPr>
       </a:lvl9pPr>
     </p:titleStyle>
@@ -2427,6 +2467,7 @@
             <a:srgbClr val="111111"/>
           </a:solidFill>
           <a:latin typeface="+mn-lt"/>
+          <a:cs typeface="+mn-cs"/>
         </a:defRPr>
       </a:lvl1pPr>
       <a:lvl2pPr marL="0" indent="0" algn="l">
@@ -2445,6 +2486,7 @@
             <a:srgbClr val="111111"/>
           </a:solidFill>
           <a:latin typeface="+mn-lt"/>
+          <a:cs typeface="+mn-cs"/>
         </a:defRPr>
       </a:lvl2pPr>
       <a:lvl3pPr marL="0" indent="0" algn="l">
@@ -2463,6 +2505,7 @@
             <a:srgbClr val="111111"/>
           </a:solidFill>
           <a:latin typeface="+mn-lt"/>
+          <a:cs typeface="+mn-cs"/>
         </a:defRPr>
       </a:lvl3pPr>
       <a:lvl4pPr marL="0" indent="0" algn="l">
@@ -2481,6 +2524,7 @@
             <a:srgbClr val="111111"/>
           </a:solidFill>
           <a:latin typeface="+mn-lt"/>
+          <a:cs typeface="+mn-cs"/>
         </a:defRPr>
       </a:lvl4pPr>
       <a:lvl5pPr marL="0" indent="0" algn="l">
@@ -2499,6 +2543,7 @@
             <a:srgbClr val="111111"/>
           </a:solidFill>
           <a:latin typeface="+mn-lt"/>
+          <a:cs typeface="+mn-cs"/>
         </a:defRPr>
       </a:lvl5pPr>
       <a:lvl6pPr marL="0" indent="0" algn="l">
@@ -2517,6 +2562,7 @@
             <a:srgbClr val="111111"/>
           </a:solidFill>
           <a:latin typeface="+mn-lt"/>
+          <a:cs typeface="+mn-cs"/>
         </a:defRPr>
       </a:lvl6pPr>
       <a:lvl7pPr marL="0" indent="0" algn="l">
@@ -2535,6 +2581,7 @@
             <a:srgbClr val="111111"/>
           </a:solidFill>
           <a:latin typeface="+mn-lt"/>
+          <a:cs typeface="+mn-cs"/>
         </a:defRPr>
       </a:lvl7pPr>
       <a:lvl8pPr marL="0" indent="0" algn="l">
@@ -2553,6 +2600,7 @@
             <a:srgbClr val="111111"/>
           </a:solidFill>
           <a:latin typeface="+mn-lt"/>
+          <a:cs typeface="+mn-cs"/>
         </a:defRPr>
       </a:lvl8pPr>
       <a:lvl9pPr marL="0" indent="0" algn="l">
@@ -2571,6 +2619,7 @@
             <a:srgbClr val="111111"/>
           </a:solidFill>
           <a:latin typeface="+mn-lt"/>
+          <a:cs typeface="+mn-cs"/>
         </a:defRPr>
       </a:lvl9pPr>
     </p:bodyStyle>
@@ -2591,6 +2640,7 @@
             <a:srgbClr val="111111"/>
           </a:solidFill>
           <a:latin typeface="+mn-lt"/>
+          <a:cs typeface="+mn-cs"/>
         </a:defRPr>
       </a:lvl1pPr>
       <a:lvl2pPr marL="0" indent="0" algn="l">
@@ -2609,6 +2659,7 @@
             <a:srgbClr val="111111"/>
           </a:solidFill>
           <a:latin typeface="+mn-lt"/>
+          <a:cs typeface="+mn-cs"/>
         </a:defRPr>
       </a:lvl2pPr>
       <a:lvl3pPr marL="0" indent="0" algn="l">
@@ -2627,6 +2678,7 @@
             <a:srgbClr val="111111"/>
           </a:solidFill>
           <a:latin typeface="+mn-lt"/>
+          <a:cs typeface="+mn-cs"/>
         </a:defRPr>
       </a:lvl3pPr>
       <a:lvl4pPr marL="0" indent="0" algn="l">
@@ -2645,6 +2697,7 @@
             <a:srgbClr val="111111"/>
           </a:solidFill>
           <a:latin typeface="+mn-lt"/>
+          <a:cs typeface="+mn-cs"/>
         </a:defRPr>
       </a:lvl4pPr>
       <a:lvl5pPr marL="0" indent="0" algn="l">
@@ -2663,6 +2716,7 @@
             <a:srgbClr val="111111"/>
           </a:solidFill>
           <a:latin typeface="+mn-lt"/>
+          <a:cs typeface="+mn-cs"/>
         </a:defRPr>
       </a:lvl5pPr>
       <a:lvl6pPr marL="0" indent="0" algn="l">
@@ -2681,6 +2735,7 @@
             <a:srgbClr val="111111"/>
           </a:solidFill>
           <a:latin typeface="+mn-lt"/>
+          <a:cs typeface="+mn-cs"/>
         </a:defRPr>
       </a:lvl6pPr>
       <a:lvl7pPr marL="0" indent="0" algn="l">
@@ -2699,6 +2754,7 @@
             <a:srgbClr val="111111"/>
           </a:solidFill>
           <a:latin typeface="+mn-lt"/>
+          <a:cs typeface="+mn-cs"/>
         </a:defRPr>
       </a:lvl7pPr>
       <a:lvl8pPr marL="0" indent="0" algn="l">
@@ -2717,6 +2773,7 @@
             <a:srgbClr val="111111"/>
           </a:solidFill>
           <a:latin typeface="+mn-lt"/>
+          <a:cs typeface="+mn-cs"/>
         </a:defRPr>
       </a:lvl8pPr>
       <a:lvl9pPr marL="0" indent="0" algn="l">
@@ -2735,6 +2792,7 @@
             <a:srgbClr val="111111"/>
           </a:solidFill>
           <a:latin typeface="+mn-lt"/>
+          <a:cs typeface="+mn-cs"/>
         </a:defRPr>
       </a:lvl9pPr>
     </p:otherStyle>
@@ -3296,12 +3354,12 @@
       <a:majorFont>
         <a:latin typeface="Arial"/>
         <a:ea typeface=""/>
-        <a:cs typeface=""/>
+        <a:cs typeface="Arial"/>
       </a:majorFont>
       <a:minorFont>
         <a:latin typeface="Arial"/>
         <a:ea typeface=""/>
-        <a:cs typeface=""/>
+        <a:cs typeface="Arial"/>
       </a:minorFont>
     </a:fontScheme>
     <a:fmtScheme name="swiss">
